--- a/dist/초2/국어/이야기와쓰기/초2_국어_이야기와쓰기_02_인물의마음.pptx
+++ b/dist/초2/국어/이야기와쓰기/초2_국어_이야기와쓰기_02_인물의마음.pptx
@@ -119,13 +119,13 @@
   <p:extLst>
     <p:ext uri="{521415D9-36F7-43E2-AB2F-B90AF26B5E84}">
       <p14:sectionLst xmlns:p14="http://schemas.microsoft.com/office/powerpoint/2010/main">
-        <p14:section name="도입" id="{6b03a837-4aa3-3661-8269-7f2b3872e357}">
+        <p14:section name="도입" id="{46f73040-e2b6-7d5d-fdb9-fb5eb1ab3168}">
           <p14:sldIdLst>
             <p14:sldId id="256"/>
             <p14:sldId id="257"/>
           </p14:sldIdLst>
         </p14:section>
-        <p14:section name="개념" id="{fb28630f-50ac-8f00-a1e8-2b9c36639b08}">
+        <p14:section name="개념" id="{6dc33aab-183d-a972-866b-d6283b39d9d1}">
           <p14:sldIdLst>
             <p14:sldId id="258"/>
             <p14:sldId id="259"/>
@@ -133,25 +133,25 @@
             <p14:sldId id="261"/>
           </p14:sldIdLst>
         </p14:section>
-        <p14:section name="연습" id="{7a8b7e84-380e-7345-5b97-cd3c8888b005}">
+        <p14:section name="연습" id="{8ae07341-45c9-5aa6-d104-f5eecc9554d8}">
           <p14:sldIdLst>
             <p14:sldId id="262"/>
             <p14:sldId id="263"/>
           </p14:sldIdLst>
         </p14:section>
-        <p14:section name="확인" id="{80127f20-9c0e-fe9b-9c33-e353e5ea692b}">
+        <p14:section name="확인" id="{501ec23c-139f-8989-b402-5108e27a8041}">
           <p14:sldIdLst>
             <p14:sldId id="264"/>
             <p14:sldId id="265"/>
             <p14:sldId id="266"/>
           </p14:sldIdLst>
         </p14:section>
-        <p14:section name="정리" id="{eb49fce0-971c-8375-68db-2c456a67d11c}">
+        <p14:section name="정리" id="{3bb830f6-5ebf-c3aa-3c5c-aad7318fae03}">
           <p14:sldIdLst>
             <p14:sldId id="267"/>
           </p14:sldIdLst>
         </p14:section>
-        <p14:section name="보충" id="{2cf09cef-024a-02c3-6fbd-fe9272a4bf21}">
+        <p14:section name="보충" id="{d74d3ff1-9c0a-fb74-3c91-d83d911848d8}">
           <p14:sldIdLst>
             <p14:sldId id="268"/>
           </p14:sldIdLst>
